--- a/public/fun/pack/pptx/talkpro/발표템플릿프리미엄_05_연말결산·회고_라일락실버.pptx
+++ b/public/fun/pack/pptx/talkpro/발표템플릿프리미엄_05_연말결산·회고_라일락실버.pptx
@@ -115,12 +115,12 @@
   <p:extLst>
     <p:ext uri="{521415D9-36F7-43E2-AB2F-B90AF26B5E84}">
       <p14:sectionLst xmlns:p14="http://schemas.microsoft.com/office/powerpoint/2010/main">
-        <p14:section name="시작" id="{EB795E15-EA74-4B36-8E32-9EDAE2E5DE24}">
+        <p14:section name="시작" id="{3592CC9A-5759-468E-A3BF-1FA557BB8F86}">
           <p14:sldIdLst>
             <p14:sldId id="256"/>
           </p14:sldIdLst>
         </p14:section>
-        <p14:section name="본문" id="{6E496CA8-C958-4466-8DCD-C183C3C93815}">
+        <p14:section name="본문" id="{97D26FB3-3D20-4768-BD96-A0F272BF0853}">
           <p14:sldIdLst>
             <p14:sldId id="257"/>
             <p14:sldId id="258"/>
@@ -131,7 +131,7 @@
             <p14:sldId id="263"/>
           </p14:sldIdLst>
         </p14:section>
-        <p14:section name="마무리" id="{2433794F-3130-4E5C-93A9-B08F4204D5B1}">
+        <p14:section name="마무리" id="{BDA7F7B4-8825-4F56-A03C-11725F07FF7C}">
           <p14:sldIdLst>
             <p14:sldId id="264"/>
           </p14:sldIdLst>
@@ -1887,7 +1887,7 @@
             </a:lvl1pPr>
           </a:lstStyle>
           <a:p>
-            <a:fld id="{2B5BF6A5-75C4-4A70-941F-E9E6CE75B083}" type="slidenum">
+            <a:fld id="{A8C50AA3-F6DB-413E-84C2-94D750EC04AE}" type="slidenum">
               <a:rPr lang="en-US"/>
               <a:t>‹#›</a:t>
             </a:fld>
@@ -2515,7 +2515,7 @@
             </a:lvl1pPr>
           </a:lstStyle>
           <a:p>
-            <a:fld id="{7251D69B-9C28-44E6-A1B9-6679B49C9A77}" type="slidenum">
+            <a:fld id="{66A9EA90-4A65-4579-A032-FFBCAF7F5CF1}" type="slidenum">
               <a:rPr lang="en-US"/>
               <a:t>‹#›</a:t>
             </a:fld>
@@ -3144,7 +3144,7 @@
             </a:lvl1pPr>
           </a:lstStyle>
           <a:p>
-            <a:fld id="{C8777500-F34D-4D74-8501-0168371CD049}" type="slidenum">
+            <a:fld id="{62E8D63F-C32D-478D-BCA8-AE155D350D33}" type="slidenum">
               <a:rPr lang="en-US"/>
               <a:t>‹#›</a:t>
             </a:fld>
@@ -3983,7 +3983,7 @@
           <a:p>
             <a:r>
               <a:rPr lang="ko-KR"/>
-              <a:t>올해 한 일을 월별로 돌아봅니다</a:t>
+              <a:t>그동안 한 일을 차례로 돌아봅니다</a:t>
             </a:r>
           </a:p>
         </p:txBody>
@@ -4011,7 +4011,7 @@
           <a:p>
             <a:r>
               <a:rPr lang="ko-KR"/>
-              <a:t>0000. 00. 00</a:t>
+              <a:t>날짜 입력</a:t>
             </a:r>
           </a:p>
         </p:txBody>
@@ -4096,7 +4096,7 @@
           <a:bodyPr/>
           <a:lstStyle/>
           <a:p>
-            <a:fld id="{185FC591-8C47-4776-BC19-296D32A1C25A}" type="slidenum">
+            <a:fld id="{4A5DFDF8-A839-4648-9126-392B506D367A}" type="slidenum">
               <a:rPr lang="en-US"/>
               <a:t>‹#›</a:t>
             </a:fld>
@@ -5270,7 +5270,7 @@
           <a:bodyPr/>
           <a:lstStyle/>
           <a:p>
-            <a:fld id="{EE0997DE-3809-4A71-BE16-AF260E7A8F12}" type="slidenum">
+            <a:fld id="{0312D64A-647B-4D1A-A143-4B6EAE081900}" type="slidenum">
               <a:rPr lang="en-US"/>
               <a:t>‹#›</a:t>
             </a:fld>
@@ -5358,7 +5358,7 @@
           <a:bodyPr/>
           <a:lstStyle/>
           <a:p>
-            <a:fld id="{16D56CE7-7290-4AF6-8C70-5C300907555A}" type="slidenum">
+            <a:fld id="{BB9482F5-665A-4C16-9714-E5F035CB990F}" type="slidenum">
               <a:rPr lang="en-US"/>
               <a:t>‹#›</a:t>
             </a:fld>
@@ -6310,7 +6310,7 @@
           <a:bodyPr/>
           <a:lstStyle/>
           <a:p>
-            <a:fld id="{6CE38E21-096D-474B-BE76-243F4D15D071}" type="slidenum">
+            <a:fld id="{9192ACC7-F759-4D71-AEF8-439D80BDE05D}" type="slidenum">
               <a:rPr lang="en-US"/>
               <a:t>‹#›</a:t>
             </a:fld>
@@ -6912,7 +6912,7 @@
           <a:bodyPr/>
           <a:lstStyle/>
           <a:p>
-            <a:fld id="{91D8A389-7731-4756-8F59-8561760776A5}" type="slidenum">
+            <a:fld id="{3FFD12ED-3C6B-4F13-8E4D-8C19252F2A96}" type="slidenum">
               <a:rPr lang="en-US"/>
               <a:t>‹#›</a:t>
             </a:fld>
@@ -7095,7 +7095,7 @@
           <a:bodyPr/>
           <a:lstStyle/>
           <a:p>
-            <a:fld id="{C1A40E06-3E4E-4376-8435-D8B48524B09A}" type="slidenum">
+            <a:fld id="{155D561E-F4F9-405D-8508-93C0C583C6CB}" type="slidenum">
               <a:rPr lang="en-US"/>
               <a:t>‹#›</a:t>
             </a:fld>
@@ -8159,7 +8159,7 @@
           <a:bodyPr/>
           <a:lstStyle/>
           <a:p>
-            <a:fld id="{BA4A59A4-E9D7-4AA5-851D-6A910CD153BE}" type="slidenum">
+            <a:fld id="{ECAB0B58-4013-454B-B6F1-D8CED0B2ABB0}" type="slidenum">
               <a:rPr lang="en-US"/>
               <a:t>‹#›</a:t>
             </a:fld>
